--- a/data-engineering/01-storage-and-compute-foundations/slides/storage-and-compute-foundations.pptx
+++ b/data-engineering/01-storage-and-compute-foundations/slides/storage-and-compute-foundations.pptx
@@ -37,6 +37,7 @@
     <p:sldId id="285" r:id="rId37"/>
     <p:sldId id="286" r:id="rId38"/>
     <p:sldId id="287" r:id="rId39"/>
+    <p:sldId id="288" r:id="rId40"/>
   </p:sldIdLst>
   <p:sldSz cx="12191695" cy="6858000" type="screen4x3"/>
   <p:notesSz cx="6858000" cy="9144000"/>
@@ -2404,6 +2405,82 @@
           <a:p>
             <a:r>
               <a:t>From here, pillar 2 takes data out of sources and shapes it for questions, relying on everything we learned about files and lag.</a:t>
+            </a:r>
+          </a:p>
+          <a:p/>
+          <a:p>
+            <a:r>
+              <a:t>Source: notes/04-partitioning-and-replication.md</a:t>
+            </a:r>
+          </a:p>
+        </p:txBody>
+      </p:sp>
+      <p:sp>
+        <p:nvSpPr>
+          <p:cNvPr id="4" name="Slide Number Placeholder 3"/>
+          <p:cNvSpPr>
+            <a:spLocks noGrp="1"/>
+          </p:cNvSpPr>
+          <p:nvPr>
+            <p:ph type="sldNum" idx="5" sz="quarter"/>
+          </p:nvPr>
+        </p:nvSpPr>
+        <p:spPr/>
+      </p:sp>
+    </p:spTree>
+  </p:cSld>
+  <p:clrMapOvr>
+    <a:masterClrMapping/>
+  </p:clrMapOvr>
+</p:notes>
+</file>
+
+<file path=ppt/notesSlides/notesSlide33.xml><?xml version="1.0" encoding="utf-8"?>
+<p:notes xmlns:a="http://schemas.openxmlformats.org/drawingml/2006/main" xmlns:p="http://schemas.openxmlformats.org/presentationml/2006/main" xmlns:r="http://schemas.openxmlformats.org/officeDocument/2006/relationships">
+  <p:cSld>
+    <p:spTree>
+      <p:nvGrpSpPr>
+        <p:cNvPr id="1" name=""/>
+        <p:cNvGrpSpPr/>
+        <p:nvPr/>
+      </p:nvGrpSpPr>
+      <p:grpSpPr>
+        <a:xfrm>
+          <a:off x="0" y="0"/>
+          <a:ext cx="0" cy="0"/>
+          <a:chOff x="0" y="0"/>
+          <a:chExt cx="0" cy="0"/>
+        </a:xfrm>
+      </p:grpSpPr>
+      <p:sp>
+        <p:nvSpPr>
+          <p:cNvPr id="2" name="Slide Image Placeholder 1"/>
+          <p:cNvSpPr>
+            <a:spLocks noGrp="1"/>
+          </p:cNvSpPr>
+          <p:nvPr>
+            <p:ph type="sldImg" idx="2"/>
+          </p:nvPr>
+        </p:nvSpPr>
+        <p:spPr/>
+      </p:sp>
+      <p:sp>
+        <p:nvSpPr>
+          <p:cNvPr id="3" name="Notes Placeholder 2"/>
+          <p:cNvSpPr>
+            <a:spLocks noGrp="1"/>
+          </p:cNvSpPr>
+          <p:nvPr>
+            <p:ph type="body" idx="3" sz="quarter"/>
+          </p:nvPr>
+        </p:nvSpPr>
+        <p:spPr/>
+        <p:txBody>
+          <a:bodyPr/>
+          <a:lstStyle/>
+          <a:p>
+            <a:r>
+              <a:t>Pillar two starts at the source system, where replica lag and log positions become your problem.</a:t>
             </a:r>
           </a:p>
           <a:p/>
@@ -9331,7 +9408,7 @@
         <p:spPr>
           <a:xfrm>
             <a:off x="502920" y="1472184"/>
-            <a:ext cx="2590723" cy="4014215"/>
+            <a:ext cx="2590723" cy="2279904"/>
           </a:xfrm>
           <a:prstGeom prst="rect">
             <a:avLst/>
@@ -9377,7 +9454,7 @@
         <p:spPr>
           <a:xfrm>
             <a:off x="502920" y="1472184"/>
-            <a:ext cx="82296" cy="4014215"/>
+            <a:ext cx="82296" cy="2279904"/>
           </a:xfrm>
           <a:prstGeom prst="rect">
             <a:avLst/>
@@ -9453,14 +9530,53 @@
       </p:sp>
       <p:sp>
         <p:nvSpPr>
-          <p:cNvPr id="15" name="Rectangle 14"/>
+          <p:cNvPr id="15" name="TextBox 14"/>
+          <p:cNvSpPr txBox="1"/>
+          <p:nvPr/>
+        </p:nvSpPr>
+        <p:spPr>
+          <a:xfrm>
+            <a:off x="777240" y="2087880"/>
+            <a:ext cx="2087803" cy="1481327"/>
+          </a:xfrm>
+          <a:prstGeom prst="rect">
+            <a:avLst/>
+          </a:prstGeom>
+          <a:noFill/>
+        </p:spPr>
+        <p:txBody>
+          <a:bodyPr wrap="square" lIns="0" rIns="0" tIns="0" bIns="0" anchor="t">
+            <a:noAutofit/>
+          </a:bodyPr>
+          <a:lstStyle/>
+          <a:p>
+            <a:pPr algn="l">
+              <a:lnSpc>
+                <a:spcPct val="110000"/>
+              </a:lnSpc>
+            </a:pPr>
+            <a:r>
+              <a:rPr sz="1800" i="0" b="0">
+                <a:solidFill>
+                  <a:srgbClr val="475569"/>
+                </a:solidFill>
+                <a:latin typeface="Helvetica Neue"/>
+              </a:rPr>
+              <a:t>A query names 4 or 5 of a fact table's 100 columns.</a:t>
+            </a:r>
+          </a:p>
+        </p:txBody>
+      </p:sp>
+      <p:sp>
+        <p:nvSpPr>
+          <p:cNvPr id="16" name="Rectangle 15"/>
           <p:cNvSpPr/>
           <p:nvPr/>
         </p:nvSpPr>
         <p:spPr>
           <a:xfrm>
             <a:off x="3367963" y="1472184"/>
-            <a:ext cx="2590723" cy="4014215"/>
+            <a:ext cx="2590723" cy="2279904"/>
           </a:xfrm>
           <a:prstGeom prst="rect">
             <a:avLst/>
@@ -9499,14 +9615,14 @@
       </p:sp>
       <p:sp>
         <p:nvSpPr>
-          <p:cNvPr id="16" name="Rectangle 15"/>
+          <p:cNvPr id="17" name="Rectangle 16"/>
           <p:cNvSpPr/>
           <p:nvPr/>
         </p:nvSpPr>
         <p:spPr>
           <a:xfrm>
             <a:off x="3367963" y="1472184"/>
-            <a:ext cx="82296" cy="4014215"/>
+            <a:ext cx="82296" cy="2279904"/>
           </a:xfrm>
           <a:prstGeom prst="rect">
             <a:avLst/>
@@ -9543,7 +9659,7 @@
       </p:sp>
       <p:sp>
         <p:nvSpPr>
-          <p:cNvPr id="17" name="TextBox 16"/>
+          <p:cNvPr id="18" name="TextBox 17"/>
           <p:cNvSpPr txBox="1"/>
           <p:nvPr/>
         </p:nvSpPr>
@@ -9582,14 +9698,53 @@
       </p:sp>
       <p:sp>
         <p:nvSpPr>
-          <p:cNvPr id="18" name="Rectangle 17"/>
+          <p:cNvPr id="19" name="TextBox 18"/>
+          <p:cNvSpPr txBox="1"/>
+          <p:nvPr/>
+        </p:nvSpPr>
+        <p:spPr>
+          <a:xfrm>
+            <a:off x="3642283" y="2087880"/>
+            <a:ext cx="2087803" cy="1481327"/>
+          </a:xfrm>
+          <a:prstGeom prst="rect">
+            <a:avLst/>
+          </a:prstGeom>
+          <a:noFill/>
+        </p:spPr>
+        <p:txBody>
+          <a:bodyPr wrap="square" lIns="0" rIns="0" tIns="0" bIns="0" anchor="t">
+            <a:noAutofit/>
+          </a:bodyPr>
+          <a:lstStyle/>
+          <a:p>
+            <a:pPr algn="l">
+              <a:lnSpc>
+                <a:spcPct val="110000"/>
+              </a:lnSpc>
+            </a:pPr>
+            <a:r>
+              <a:rPr sz="1800" i="0" b="0">
+                <a:solidFill>
+                  <a:srgbClr val="475569"/>
+                </a:solidFill>
+                <a:latin typeface="Helvetica Neue"/>
+              </a:rPr>
+              <a:t>Sorted, zone falls from 956,362 runs to 260.</a:t>
+            </a:r>
+          </a:p>
+        </p:txBody>
+      </p:sp>
+      <p:sp>
+        <p:nvSpPr>
+          <p:cNvPr id="20" name="Rectangle 19"/>
           <p:cNvSpPr/>
           <p:nvPr/>
         </p:nvSpPr>
         <p:spPr>
           <a:xfrm>
             <a:off x="6233007" y="1472184"/>
-            <a:ext cx="2590723" cy="4014215"/>
+            <a:ext cx="2590723" cy="2279904"/>
           </a:xfrm>
           <a:prstGeom prst="rect">
             <a:avLst/>
@@ -9628,14 +9783,14 @@
       </p:sp>
       <p:sp>
         <p:nvSpPr>
-          <p:cNvPr id="19" name="Rectangle 18"/>
+          <p:cNvPr id="21" name="Rectangle 20"/>
           <p:cNvSpPr/>
           <p:nvPr/>
         </p:nvSpPr>
         <p:spPr>
           <a:xfrm>
             <a:off x="6233007" y="1472184"/>
-            <a:ext cx="82296" cy="4014215"/>
+            <a:ext cx="82296" cy="2279904"/>
           </a:xfrm>
           <a:prstGeom prst="rect">
             <a:avLst/>
@@ -9672,7 +9827,7 @@
       </p:sp>
       <p:sp>
         <p:nvSpPr>
-          <p:cNvPr id="20" name="TextBox 19"/>
+          <p:cNvPr id="22" name="TextBox 21"/>
           <p:cNvSpPr txBox="1"/>
           <p:nvPr/>
         </p:nvSpPr>
@@ -9711,14 +9866,53 @@
       </p:sp>
       <p:sp>
         <p:nvSpPr>
-          <p:cNvPr id="21" name="Rectangle 20"/>
+          <p:cNvPr id="23" name="TextBox 22"/>
+          <p:cNvSpPr txBox="1"/>
+          <p:nvPr/>
+        </p:nvSpPr>
+        <p:spPr>
+          <a:xfrm>
+            <a:off x="6507327" y="2087880"/>
+            <a:ext cx="2087803" cy="1481327"/>
+          </a:xfrm>
+          <a:prstGeom prst="rect">
+            <a:avLst/>
+          </a:prstGeom>
+          <a:noFill/>
+        </p:spPr>
+        <p:txBody>
+          <a:bodyPr wrap="square" lIns="0" rIns="0" tIns="0" bIns="0" anchor="t">
+            <a:noAutofit/>
+          </a:bodyPr>
+          <a:lstStyle/>
+          <a:p>
+            <a:pPr algn="l">
+              <a:lnSpc>
+                <a:spcPct val="110000"/>
+              </a:lnSpc>
+            </a:pPr>
+            <a:r>
+              <a:rPr sz="1800" i="0" b="0">
+                <a:solidFill>
+                  <a:srgbClr val="475569"/>
+                </a:solidFill>
+                <a:latin typeface="Helvetica Neue"/>
+              </a:rPr>
+              <a:t>IN becomes OR and AND works bit by bit.</a:t>
+            </a:r>
+          </a:p>
+        </p:txBody>
+      </p:sp>
+      <p:sp>
+        <p:nvSpPr>
+          <p:cNvPr id="24" name="Rectangle 23"/>
           <p:cNvSpPr/>
           <p:nvPr/>
         </p:nvSpPr>
         <p:spPr>
           <a:xfrm>
             <a:off x="9098051" y="1472184"/>
-            <a:ext cx="2590723" cy="4014215"/>
+            <a:ext cx="2590723" cy="2279904"/>
           </a:xfrm>
           <a:prstGeom prst="rect">
             <a:avLst/>
@@ -9757,14 +9951,14 @@
       </p:sp>
       <p:sp>
         <p:nvSpPr>
-          <p:cNvPr id="22" name="Rectangle 21"/>
+          <p:cNvPr id="25" name="Rectangle 24"/>
           <p:cNvSpPr/>
           <p:nvPr/>
         </p:nvSpPr>
         <p:spPr>
           <a:xfrm>
             <a:off x="9098051" y="1472184"/>
-            <a:ext cx="82296" cy="4014215"/>
+            <a:ext cx="82296" cy="2279904"/>
           </a:xfrm>
           <a:prstGeom prst="rect">
             <a:avLst/>
@@ -9801,7 +9995,7 @@
       </p:sp>
       <p:sp>
         <p:nvSpPr>
-          <p:cNvPr id="23" name="TextBox 22"/>
+          <p:cNvPr id="26" name="TextBox 25"/>
           <p:cNvSpPr txBox="1"/>
           <p:nvPr/>
         </p:nvSpPr>
@@ -9834,6 +10028,45 @@
                 <a:latin typeface="Helvetica Neue"/>
               </a:rPr>
               <a:t>Vectors</a:t>
+            </a:r>
+          </a:p>
+        </p:txBody>
+      </p:sp>
+      <p:sp>
+        <p:nvSpPr>
+          <p:cNvPr id="27" name="TextBox 26"/>
+          <p:cNvSpPr txBox="1"/>
+          <p:nvPr/>
+        </p:nvSpPr>
+        <p:spPr>
+          <a:xfrm>
+            <a:off x="9372371" y="2087880"/>
+            <a:ext cx="2087803" cy="1481327"/>
+          </a:xfrm>
+          <a:prstGeom prst="rect">
+            <a:avLst/>
+          </a:prstGeom>
+          <a:noFill/>
+        </p:spPr>
+        <p:txBody>
+          <a:bodyPr wrap="square" lIns="0" rIns="0" tIns="0" bIns="0" anchor="t">
+            <a:noAutofit/>
+          </a:bodyPr>
+          <a:lstStyle/>
+          <a:p>
+            <a:pPr algn="l">
+              <a:lnSpc>
+                <a:spcPct val="110000"/>
+              </a:lnSpc>
+            </a:pPr>
+            <a:r>
+              <a:rPr sz="1800" i="0" b="0">
+                <a:solidFill>
+                  <a:srgbClr val="475569"/>
+                </a:solidFill>
+                <a:latin typeface="Helvetica Neue"/>
+              </a:rPr>
+              <a:t>Loops over 1,024 values fit in cache and use SIMD.</a:t>
             </a:r>
           </a:p>
         </p:txBody>
@@ -23979,7 +24212,7 @@
         <p:spPr>
           <a:xfrm>
             <a:off x="502920" y="1472184"/>
-            <a:ext cx="3545738" cy="4014215"/>
+            <a:ext cx="3545738" cy="2414016"/>
           </a:xfrm>
           <a:prstGeom prst="rect">
             <a:avLst/>
@@ -24025,7 +24258,7 @@
         <p:spPr>
           <a:xfrm>
             <a:off x="502920" y="1472184"/>
-            <a:ext cx="82296" cy="4014215"/>
+            <a:ext cx="82296" cy="2414016"/>
           </a:xfrm>
           <a:prstGeom prst="rect">
             <a:avLst/>
@@ -24101,14 +24334,53 @@
       </p:sp>
       <p:sp>
         <p:nvSpPr>
-          <p:cNvPr id="15" name="Rectangle 14"/>
+          <p:cNvPr id="15" name="TextBox 14"/>
+          <p:cNvSpPr txBox="1"/>
+          <p:nvPr/>
+        </p:nvSpPr>
+        <p:spPr>
+          <a:xfrm>
+            <a:off x="777240" y="2087880"/>
+            <a:ext cx="3042818" cy="1615439"/>
+          </a:xfrm>
+          <a:prstGeom prst="rect">
+            <a:avLst/>
+          </a:prstGeom>
+          <a:noFill/>
+        </p:spPr>
+        <p:txBody>
+          <a:bodyPr wrap="square" lIns="0" rIns="0" tIns="0" bIns="0" anchor="t">
+            <a:noAutofit/>
+          </a:bodyPr>
+          <a:lstStyle/>
+          <a:p>
+            <a:pPr algn="l">
+              <a:lnSpc>
+                <a:spcPct val="110000"/>
+              </a:lnSpc>
+            </a:pPr>
+            <a:r>
+              <a:rPr sz="2000" i="0" b="0">
+                <a:solidFill>
+                  <a:srgbClr val="475569"/>
+                </a:solidFill>
+                <a:latin typeface="Helvetica Neue"/>
+              </a:rPr>
+              <a:t>You save something, then read a replica that lacks it.</a:t>
+            </a:r>
+          </a:p>
+        </p:txBody>
+      </p:sp>
+      <p:sp>
+        <p:nvSpPr>
+          <p:cNvPr id="16" name="Rectangle 15"/>
           <p:cNvSpPr/>
           <p:nvPr/>
         </p:nvSpPr>
         <p:spPr>
           <a:xfrm>
             <a:off x="4322978" y="1472184"/>
-            <a:ext cx="3545738" cy="4014215"/>
+            <a:ext cx="3545738" cy="2414016"/>
           </a:xfrm>
           <a:prstGeom prst="rect">
             <a:avLst/>
@@ -24147,14 +24419,14 @@
       </p:sp>
       <p:sp>
         <p:nvSpPr>
-          <p:cNvPr id="16" name="Rectangle 15"/>
+          <p:cNvPr id="17" name="Rectangle 16"/>
           <p:cNvSpPr/>
           <p:nvPr/>
         </p:nvSpPr>
         <p:spPr>
           <a:xfrm>
             <a:off x="4322978" y="1472184"/>
-            <a:ext cx="82296" cy="4014215"/>
+            <a:ext cx="82296" cy="2414016"/>
           </a:xfrm>
           <a:prstGeom prst="rect">
             <a:avLst/>
@@ -24191,7 +24463,7 @@
       </p:sp>
       <p:sp>
         <p:nvSpPr>
-          <p:cNvPr id="17" name="TextBox 16"/>
+          <p:cNvPr id="18" name="TextBox 17"/>
           <p:cNvSpPr txBox="1"/>
           <p:nvPr/>
         </p:nvSpPr>
@@ -24230,14 +24502,53 @@
       </p:sp>
       <p:sp>
         <p:nvSpPr>
-          <p:cNvPr id="18" name="Rectangle 17"/>
+          <p:cNvPr id="19" name="TextBox 18"/>
+          <p:cNvSpPr txBox="1"/>
+          <p:nvPr/>
+        </p:nvSpPr>
+        <p:spPr>
+          <a:xfrm>
+            <a:off x="4597298" y="2087880"/>
+            <a:ext cx="3042818" cy="1615439"/>
+          </a:xfrm>
+          <a:prstGeom prst="rect">
+            <a:avLst/>
+          </a:prstGeom>
+          <a:noFill/>
+        </p:spPr>
+        <p:txBody>
+          <a:bodyPr wrap="square" lIns="0" rIns="0" tIns="0" bIns="0" anchor="t">
+            <a:noAutofit/>
+          </a:bodyPr>
+          <a:lstStyle/>
+          <a:p>
+            <a:pPr algn="l">
+              <a:lnSpc>
+                <a:spcPct val="110000"/>
+              </a:lnSpc>
+            </a:pPr>
+            <a:r>
+              <a:rPr sz="2000" i="0" b="0">
+                <a:solidFill>
+                  <a:srgbClr val="475569"/>
+                </a:solidFill>
+                <a:latin typeface="Helvetica Neue"/>
+              </a:rPr>
+              <a:t>Nine comments, then seven: replicas with different lag. Pin users by hash.</a:t>
+            </a:r>
+          </a:p>
+        </p:txBody>
+      </p:sp>
+      <p:sp>
+        <p:nvSpPr>
+          <p:cNvPr id="20" name="Rectangle 19"/>
           <p:cNvSpPr/>
           <p:nvPr/>
         </p:nvSpPr>
         <p:spPr>
           <a:xfrm>
             <a:off x="8143036" y="1472184"/>
-            <a:ext cx="3545738" cy="4014215"/>
+            <a:ext cx="3545738" cy="2414016"/>
           </a:xfrm>
           <a:prstGeom prst="rect">
             <a:avLst/>
@@ -24276,14 +24587,14 @@
       </p:sp>
       <p:sp>
         <p:nvSpPr>
-          <p:cNvPr id="19" name="Rectangle 18"/>
+          <p:cNvPr id="21" name="Rectangle 20"/>
           <p:cNvSpPr/>
           <p:nvPr/>
         </p:nvSpPr>
         <p:spPr>
           <a:xfrm>
             <a:off x="8143036" y="1472184"/>
-            <a:ext cx="82296" cy="4014215"/>
+            <a:ext cx="82296" cy="2414016"/>
           </a:xfrm>
           <a:prstGeom prst="rect">
             <a:avLst/>
@@ -24320,7 +24631,7 @@
       </p:sp>
       <p:sp>
         <p:nvSpPr>
-          <p:cNvPr id="20" name="TextBox 19"/>
+          <p:cNvPr id="22" name="TextBox 21"/>
           <p:cNvSpPr txBox="1"/>
           <p:nvPr/>
         </p:nvSpPr>
@@ -24353,6 +24664,45 @@
                 <a:latin typeface="Helvetica Neue"/>
               </a:rPr>
               <a:t>Consistent prefix</a:t>
+            </a:r>
+          </a:p>
+        </p:txBody>
+      </p:sp>
+      <p:sp>
+        <p:nvSpPr>
+          <p:cNvPr id="23" name="TextBox 22"/>
+          <p:cNvSpPr txBox="1"/>
+          <p:nvPr/>
+        </p:nvSpPr>
+        <p:spPr>
+          <a:xfrm>
+            <a:off x="8417356" y="2087880"/>
+            <a:ext cx="3042818" cy="1615439"/>
+          </a:xfrm>
+          <a:prstGeom prst="rect">
+            <a:avLst/>
+          </a:prstGeom>
+          <a:noFill/>
+        </p:spPr>
+        <p:txBody>
+          <a:bodyPr wrap="square" lIns="0" rIns="0" tIns="0" bIns="0" anchor="t">
+            <a:noAutofit/>
+          </a:bodyPr>
+          <a:lstStyle/>
+          <a:p>
+            <a:pPr algn="l">
+              <a:lnSpc>
+                <a:spcPct val="110000"/>
+              </a:lnSpc>
+            </a:pPr>
+            <a:r>
+              <a:rPr sz="2000" i="0" b="0">
+                <a:solidFill>
+                  <a:srgbClr val="475569"/>
+                </a:solidFill>
+                <a:latin typeface="Helvetica Neue"/>
+              </a:rPr>
+              <a:t>Answers before questions: partitions have no global order.</a:t>
             </a:r>
           </a:p>
         </p:txBody>
@@ -25962,7 +26312,7 @@
         <p:spPr>
           <a:xfrm>
             <a:off x="502920" y="1472184"/>
-            <a:ext cx="3545738" cy="1869948"/>
+            <a:ext cx="3545738" cy="1743456"/>
           </a:xfrm>
           <a:prstGeom prst="rect">
             <a:avLst/>
@@ -26008,7 +26358,7 @@
         <p:spPr>
           <a:xfrm>
             <a:off x="502920" y="1472184"/>
-            <a:ext cx="82296" cy="1869948"/>
+            <a:ext cx="82296" cy="1743456"/>
           </a:xfrm>
           <a:prstGeom prst="rect">
             <a:avLst/>
@@ -26084,14 +26434,53 @@
       </p:sp>
       <p:sp>
         <p:nvSpPr>
-          <p:cNvPr id="15" name="Rectangle 14"/>
+          <p:cNvPr id="15" name="TextBox 14"/>
+          <p:cNvSpPr txBox="1"/>
+          <p:nvPr/>
+        </p:nvSpPr>
+        <p:spPr>
+          <a:xfrm>
+            <a:off x="777240" y="2087880"/>
+            <a:ext cx="3042818" cy="944879"/>
+          </a:xfrm>
+          <a:prstGeom prst="rect">
+            <a:avLst/>
+          </a:prstGeom>
+          <a:noFill/>
+        </p:spPr>
+        <p:txBody>
+          <a:bodyPr wrap="square" lIns="0" rIns="0" tIns="0" bIns="0" anchor="t">
+            <a:noAutofit/>
+          </a:bodyPr>
+          <a:lstStyle/>
+          <a:p>
+            <a:pPr algn="l">
+              <a:lnSpc>
+                <a:spcPct val="110000"/>
+              </a:lnSpc>
+            </a:pPr>
+            <a:r>
+              <a:rPr sz="2000" i="0" b="0">
+                <a:solidFill>
+                  <a:srgbClr val="475569"/>
+                </a:solidFill>
+                <a:latin typeface="Helvetica Neue"/>
+              </a:rPr>
+              <a:t>On first read of any CSV, then convert.</a:t>
+            </a:r>
+          </a:p>
+        </p:txBody>
+      </p:sp>
+      <p:sp>
+        <p:nvSpPr>
+          <p:cNvPr id="16" name="Rectangle 15"/>
           <p:cNvSpPr/>
           <p:nvPr/>
         </p:nvSpPr>
         <p:spPr>
           <a:xfrm>
             <a:off x="4322978" y="1472184"/>
-            <a:ext cx="3545738" cy="1869948"/>
+            <a:ext cx="3545738" cy="1743456"/>
           </a:xfrm>
           <a:prstGeom prst="rect">
             <a:avLst/>
@@ -26130,14 +26519,14 @@
       </p:sp>
       <p:sp>
         <p:nvSpPr>
-          <p:cNvPr id="16" name="Rectangle 15"/>
+          <p:cNvPr id="17" name="Rectangle 16"/>
           <p:cNvSpPr/>
           <p:nvPr/>
         </p:nvSpPr>
         <p:spPr>
           <a:xfrm>
             <a:off x="4322978" y="1472184"/>
-            <a:ext cx="82296" cy="1869948"/>
+            <a:ext cx="82296" cy="1743456"/>
           </a:xfrm>
           <a:prstGeom prst="rect">
             <a:avLst/>
@@ -26174,7 +26563,7 @@
       </p:sp>
       <p:sp>
         <p:nvSpPr>
-          <p:cNvPr id="17" name="TextBox 16"/>
+          <p:cNvPr id="18" name="TextBox 17"/>
           <p:cNvSpPr txBox="1"/>
           <p:nvPr/>
         </p:nvSpPr>
@@ -26213,14 +26602,53 @@
       </p:sp>
       <p:sp>
         <p:nvSpPr>
-          <p:cNvPr id="18" name="Rectangle 17"/>
+          <p:cNvPr id="19" name="TextBox 18"/>
+          <p:cNvSpPr txBox="1"/>
+          <p:nvPr/>
+        </p:nvSpPr>
+        <p:spPr>
+          <a:xfrm>
+            <a:off x="4597298" y="2087880"/>
+            <a:ext cx="3042818" cy="944879"/>
+          </a:xfrm>
+          <a:prstGeom prst="rect">
+            <a:avLst/>
+          </a:prstGeom>
+          <a:noFill/>
+        </p:spPr>
+        <p:txBody>
+          <a:bodyPr wrap="square" lIns="0" rIns="0" tIns="0" bIns="0" anchor="t">
+            <a:noAutofit/>
+          </a:bodyPr>
+          <a:lstStyle/>
+          <a:p>
+            <a:pPr algn="l">
+              <a:lnSpc>
+                <a:spcPct val="110000"/>
+              </a:lnSpc>
+            </a:pPr>
+            <a:r>
+              <a:rPr sz="2000" i="0" b="0">
+                <a:solidFill>
+                  <a:srgbClr val="475569"/>
+                </a:solidFill>
+                <a:latin typeface="Helvetica Neue"/>
+              </a:rPr>
+              <a:t>Pushdown needs physical order.</a:t>
+            </a:r>
+          </a:p>
+        </p:txBody>
+      </p:sp>
+      <p:sp>
+        <p:nvSpPr>
+          <p:cNvPr id="20" name="Rectangle 19"/>
           <p:cNvSpPr/>
           <p:nvPr/>
         </p:nvSpPr>
         <p:spPr>
           <a:xfrm>
             <a:off x="8143036" y="1472184"/>
-            <a:ext cx="3545738" cy="1869948"/>
+            <a:ext cx="3545738" cy="1743456"/>
           </a:xfrm>
           <a:prstGeom prst="rect">
             <a:avLst/>
@@ -26259,14 +26687,14 @@
       </p:sp>
       <p:sp>
         <p:nvSpPr>
-          <p:cNvPr id="19" name="Rectangle 18"/>
+          <p:cNvPr id="21" name="Rectangle 20"/>
           <p:cNvSpPr/>
           <p:nvPr/>
         </p:nvSpPr>
         <p:spPr>
           <a:xfrm>
             <a:off x="8143036" y="1472184"/>
-            <a:ext cx="82296" cy="1869948"/>
+            <a:ext cx="82296" cy="1743456"/>
           </a:xfrm>
           <a:prstGeom prst="rect">
             <a:avLst/>
@@ -26303,7 +26731,7 @@
       </p:sp>
       <p:sp>
         <p:nvSpPr>
-          <p:cNvPr id="20" name="TextBox 19"/>
+          <p:cNvPr id="22" name="TextBox 21"/>
           <p:cNvSpPr txBox="1"/>
           <p:nvPr/>
         </p:nvSpPr>
@@ -26342,14 +26770,53 @@
       </p:sp>
       <p:sp>
         <p:nvSpPr>
-          <p:cNvPr id="21" name="Rectangle 20"/>
+          <p:cNvPr id="23" name="TextBox 22"/>
+          <p:cNvSpPr txBox="1"/>
+          <p:nvPr/>
+        </p:nvSpPr>
+        <p:spPr>
+          <a:xfrm>
+            <a:off x="8417356" y="2087880"/>
+            <a:ext cx="3042818" cy="944879"/>
+          </a:xfrm>
+          <a:prstGeom prst="rect">
+            <a:avLst/>
+          </a:prstGeom>
+          <a:noFill/>
+        </p:spPr>
+        <p:txBody>
+          <a:bodyPr wrap="square" lIns="0" rIns="0" tIns="0" bIns="0" anchor="t">
+            <a:noAutofit/>
+          </a:bodyPr>
+          <a:lstStyle/>
+          <a:p>
+            <a:pPr algn="l">
+              <a:lnSpc>
+                <a:spcPct val="110000"/>
+              </a:lnSpc>
+            </a:pPr>
+            <a:r>
+              <a:rPr sz="2000" i="0" b="0">
+                <a:solidFill>
+                  <a:srgbClr val="475569"/>
+                </a:solidFill>
+                <a:latin typeface="Helvetica Neue"/>
+              </a:rPr>
+              <a:t>What a query reads after pruning decides.</a:t>
+            </a:r>
+          </a:p>
+        </p:txBody>
+      </p:sp>
+      <p:sp>
+        <p:nvSpPr>
+          <p:cNvPr id="24" name="Rectangle 23"/>
           <p:cNvSpPr/>
           <p:nvPr/>
         </p:nvSpPr>
         <p:spPr>
           <a:xfrm>
-            <a:off x="502920" y="3616452"/>
-            <a:ext cx="3545738" cy="1869948"/>
+            <a:off x="502920" y="3489960"/>
+            <a:ext cx="3545738" cy="1743456"/>
           </a:xfrm>
           <a:prstGeom prst="rect">
             <a:avLst/>
@@ -26388,14 +26855,14 @@
       </p:sp>
       <p:sp>
         <p:nvSpPr>
-          <p:cNvPr id="22" name="Rectangle 21"/>
+          <p:cNvPr id="25" name="Rectangle 24"/>
           <p:cNvSpPr/>
           <p:nvPr/>
         </p:nvSpPr>
         <p:spPr>
           <a:xfrm>
-            <a:off x="502920" y="3616452"/>
-            <a:ext cx="82296" cy="1869948"/>
+            <a:off x="502920" y="3489960"/>
+            <a:ext cx="82296" cy="1743456"/>
           </a:xfrm>
           <a:prstGeom prst="rect">
             <a:avLst/>
@@ -26432,13 +26899,13 @@
       </p:sp>
       <p:sp>
         <p:nvSpPr>
-          <p:cNvPr id="23" name="TextBox 22"/>
+          <p:cNvPr id="26" name="TextBox 25"/>
           <p:cNvSpPr txBox="1"/>
           <p:nvPr/>
         </p:nvSpPr>
         <p:spPr>
           <a:xfrm>
-            <a:off x="777240" y="3799332"/>
+            <a:off x="777240" y="3672840"/>
             <a:ext cx="3088538" cy="359664"/>
           </a:xfrm>
           <a:prstGeom prst="rect">
@@ -26471,14 +26938,53 @@
       </p:sp>
       <p:sp>
         <p:nvSpPr>
-          <p:cNvPr id="24" name="Rectangle 23"/>
+          <p:cNvPr id="27" name="TextBox 26"/>
+          <p:cNvSpPr txBox="1"/>
+          <p:nvPr/>
+        </p:nvSpPr>
+        <p:spPr>
+          <a:xfrm>
+            <a:off x="777240" y="4105655"/>
+            <a:ext cx="3042818" cy="944879"/>
+          </a:xfrm>
+          <a:prstGeom prst="rect">
+            <a:avLst/>
+          </a:prstGeom>
+          <a:noFill/>
+        </p:spPr>
+        <p:txBody>
+          <a:bodyPr wrap="square" lIns="0" rIns="0" tIns="0" bIns="0" anchor="t">
+            <a:noAutofit/>
+          </a:bodyPr>
+          <a:lstStyle/>
+          <a:p>
+            <a:pPr algn="l">
+              <a:lnSpc>
+                <a:spcPct val="110000"/>
+              </a:lnSpc>
+            </a:pPr>
+            <a:r>
+              <a:rPr sz="2000" i="0" b="0">
+                <a:solidFill>
+                  <a:srgbClr val="475569"/>
+                </a:solidFill>
+                <a:latin typeface="Helvetica Neue"/>
+              </a:rPr>
+              <a:t>Sort for filters, and avoid small files.</a:t>
+            </a:r>
+          </a:p>
+        </p:txBody>
+      </p:sp>
+      <p:sp>
+        <p:nvSpPr>
+          <p:cNvPr id="28" name="Rectangle 27"/>
           <p:cNvSpPr/>
           <p:nvPr/>
         </p:nvSpPr>
         <p:spPr>
           <a:xfrm>
-            <a:off x="4322978" y="3616452"/>
-            <a:ext cx="3545738" cy="1869948"/>
+            <a:off x="4322978" y="3489960"/>
+            <a:ext cx="3545738" cy="1743456"/>
           </a:xfrm>
           <a:prstGeom prst="rect">
             <a:avLst/>
@@ -26517,14 +27023,14 @@
       </p:sp>
       <p:sp>
         <p:nvSpPr>
-          <p:cNvPr id="25" name="Rectangle 24"/>
+          <p:cNvPr id="29" name="Rectangle 28"/>
           <p:cNvSpPr/>
           <p:nvPr/>
         </p:nvSpPr>
         <p:spPr>
           <a:xfrm>
-            <a:off x="4322978" y="3616452"/>
-            <a:ext cx="82296" cy="1869948"/>
+            <a:off x="4322978" y="3489960"/>
+            <a:ext cx="82296" cy="1743456"/>
           </a:xfrm>
           <a:prstGeom prst="rect">
             <a:avLst/>
@@ -26561,13 +27067,13 @@
       </p:sp>
       <p:sp>
         <p:nvSpPr>
-          <p:cNvPr id="26" name="TextBox 25"/>
+          <p:cNvPr id="30" name="TextBox 29"/>
           <p:cNvSpPr txBox="1"/>
           <p:nvPr/>
         </p:nvSpPr>
         <p:spPr>
           <a:xfrm>
-            <a:off x="4597298" y="3799332"/>
+            <a:off x="4597298" y="3672840"/>
             <a:ext cx="3088538" cy="359664"/>
           </a:xfrm>
           <a:prstGeom prst="rect">
@@ -26600,14 +27106,53 @@
       </p:sp>
       <p:sp>
         <p:nvSpPr>
-          <p:cNvPr id="27" name="Rectangle 26"/>
+          <p:cNvPr id="31" name="TextBox 30"/>
+          <p:cNvSpPr txBox="1"/>
+          <p:nvPr/>
+        </p:nvSpPr>
+        <p:spPr>
+          <a:xfrm>
+            <a:off x="4597298" y="4105655"/>
+            <a:ext cx="3042818" cy="944879"/>
+          </a:xfrm>
+          <a:prstGeom prst="rect">
+            <a:avLst/>
+          </a:prstGeom>
+          <a:noFill/>
+        </p:spPr>
+        <p:txBody>
+          <a:bodyPr wrap="square" lIns="0" rIns="0" tIns="0" bIns="0" anchor="t">
+            <a:noAutofit/>
+          </a:bodyPr>
+          <a:lstStyle/>
+          <a:p>
+            <a:pPr algn="l">
+              <a:lnSpc>
+                <a:spcPct val="110000"/>
+              </a:lnSpc>
+            </a:pPr>
+            <a:r>
+              <a:rPr sz="2000" i="0" b="0">
+                <a:solidFill>
+                  <a:srgbClr val="475569"/>
+                </a:solidFill>
+                <a:latin typeface="Helvetica Neue"/>
+              </a:rPr>
+              <a:t>Extract to a watermark, not to now.</a:t>
+            </a:r>
+          </a:p>
+        </p:txBody>
+      </p:sp>
+      <p:sp>
+        <p:nvSpPr>
+          <p:cNvPr id="32" name="Rectangle 31"/>
           <p:cNvSpPr/>
           <p:nvPr/>
         </p:nvSpPr>
         <p:spPr>
           <a:xfrm>
-            <a:off x="8143036" y="3616452"/>
-            <a:ext cx="3545738" cy="1869948"/>
+            <a:off x="8143036" y="3489960"/>
+            <a:ext cx="3545738" cy="1743456"/>
           </a:xfrm>
           <a:prstGeom prst="rect">
             <a:avLst/>
@@ -26646,14 +27191,14 @@
       </p:sp>
       <p:sp>
         <p:nvSpPr>
-          <p:cNvPr id="28" name="Rectangle 27"/>
+          <p:cNvPr id="33" name="Rectangle 32"/>
           <p:cNvSpPr/>
           <p:nvPr/>
         </p:nvSpPr>
         <p:spPr>
           <a:xfrm>
-            <a:off x="8143036" y="3616452"/>
-            <a:ext cx="82296" cy="1869948"/>
+            <a:off x="8143036" y="3489960"/>
+            <a:ext cx="82296" cy="1743456"/>
           </a:xfrm>
           <a:prstGeom prst="rect">
             <a:avLst/>
@@ -26690,13 +27235,13 @@
       </p:sp>
       <p:sp>
         <p:nvSpPr>
-          <p:cNvPr id="29" name="TextBox 28"/>
+          <p:cNvPr id="34" name="TextBox 33"/>
           <p:cNvSpPr txBox="1"/>
           <p:nvPr/>
         </p:nvSpPr>
         <p:spPr>
           <a:xfrm>
-            <a:off x="8417356" y="3799332"/>
+            <a:off x="8417356" y="3672840"/>
             <a:ext cx="3088538" cy="359664"/>
           </a:xfrm>
           <a:prstGeom prst="rect">
@@ -26723,6 +27268,1040 @@
                 <a:latin typeface="Helvetica Neue"/>
               </a:rPr>
               <a:t>Read the plan</a:t>
+            </a:r>
+          </a:p>
+        </p:txBody>
+      </p:sp>
+      <p:sp>
+        <p:nvSpPr>
+          <p:cNvPr id="35" name="TextBox 34"/>
+          <p:cNvSpPr txBox="1"/>
+          <p:nvPr/>
+        </p:nvSpPr>
+        <p:spPr>
+          <a:xfrm>
+            <a:off x="8417356" y="4105655"/>
+            <a:ext cx="3042818" cy="944879"/>
+          </a:xfrm>
+          <a:prstGeom prst="rect">
+            <a:avLst/>
+          </a:prstGeom>
+          <a:noFill/>
+        </p:spPr>
+        <p:txBody>
+          <a:bodyPr wrap="square" lIns="0" rIns="0" tIns="0" bIns="0" anchor="t">
+            <a:noAutofit/>
+          </a:bodyPr>
+          <a:lstStyle/>
+          <a:p>
+            <a:pPr algn="l">
+              <a:lnSpc>
+                <a:spcPct val="110000"/>
+              </a:lnSpc>
+            </a:pPr>
+            <a:r>
+              <a:rPr sz="2000" i="0" b="0">
+                <a:solidFill>
+                  <a:srgbClr val="475569"/>
+                </a:solidFill>
+                <a:latin typeface="Helvetica Neue"/>
+              </a:rPr>
+              <a:t>Find the shuffle and the pruning first.</a:t>
+            </a:r>
+          </a:p>
+        </p:txBody>
+      </p:sp>
+    </p:spTree>
+  </p:cSld>
+  <p:clrMapOvr>
+    <a:masterClrMapping/>
+  </p:clrMapOvr>
+</p:sld>
+</file>
+
+<file path=ppt/slides/slide33.xml><?xml version="1.0" encoding="utf-8"?>
+<p:sld xmlns:a="http://schemas.openxmlformats.org/drawingml/2006/main" xmlns:p="http://schemas.openxmlformats.org/presentationml/2006/main" xmlns:r="http://schemas.openxmlformats.org/officeDocument/2006/relationships">
+  <p:cSld>
+    <p:bg>
+      <p:bgPr>
+        <a:solidFill>
+          <a:srgbClr val="F4F6F9"/>
+        </a:solidFill>
+        <a:effectLst/>
+      </p:bgPr>
+    </p:bg>
+    <p:spTree>
+      <p:nvGrpSpPr>
+        <p:cNvPr id="1" name=""/>
+        <p:cNvGrpSpPr/>
+        <p:nvPr/>
+      </p:nvGrpSpPr>
+      <p:grpSpPr/>
+      <p:sp>
+        <p:nvSpPr>
+          <p:cNvPr id="2" name="Rectangle 1"/>
+          <p:cNvSpPr/>
+          <p:nvPr/>
+        </p:nvSpPr>
+        <p:spPr>
+          <a:xfrm>
+            <a:off x="0" y="0"/>
+            <a:ext cx="12191695" cy="868680"/>
+          </a:xfrm>
+          <a:prstGeom prst="rect">
+            <a:avLst/>
+          </a:prstGeom>
+          <a:solidFill>
+            <a:srgbClr val="1E3A5F"/>
+          </a:solidFill>
+          <a:ln>
+            <a:noFill/>
+          </a:ln>
+          <a:effectLst/>
+        </p:spPr>
+        <p:style>
+          <a:lnRef idx="1">
+            <a:schemeClr val="accent1"/>
+          </a:lnRef>
+          <a:fillRef idx="3">
+            <a:schemeClr val="accent1"/>
+          </a:fillRef>
+          <a:effectRef idx="2">
+            <a:schemeClr val="accent1"/>
+          </a:effectRef>
+          <a:fontRef idx="minor">
+            <a:schemeClr val="lt1"/>
+          </a:fontRef>
+        </p:style>
+        <p:txBody>
+          <a:bodyPr rtlCol="0" anchor="ctr"/>
+          <a:lstStyle/>
+          <a:p>
+            <a:pPr algn="ctr"/>
+          </a:p>
+        </p:txBody>
+      </p:sp>
+      <p:sp>
+        <p:nvSpPr>
+          <p:cNvPr id="3" name="Rectangle 2"/>
+          <p:cNvSpPr/>
+          <p:nvPr/>
+        </p:nvSpPr>
+        <p:spPr>
+          <a:xfrm>
+            <a:off x="0" y="0"/>
+            <a:ext cx="128016" cy="868680"/>
+          </a:xfrm>
+          <a:prstGeom prst="rect">
+            <a:avLst/>
+          </a:prstGeom>
+          <a:solidFill>
+            <a:srgbClr val="166534"/>
+          </a:solidFill>
+          <a:ln>
+            <a:noFill/>
+          </a:ln>
+          <a:effectLst/>
+        </p:spPr>
+        <p:style>
+          <a:lnRef idx="1">
+            <a:schemeClr val="accent1"/>
+          </a:lnRef>
+          <a:fillRef idx="3">
+            <a:schemeClr val="accent1"/>
+          </a:fillRef>
+          <a:effectRef idx="2">
+            <a:schemeClr val="accent1"/>
+          </a:effectRef>
+          <a:fontRef idx="minor">
+            <a:schemeClr val="lt1"/>
+          </a:fontRef>
+        </p:style>
+        <p:txBody>
+          <a:bodyPr rtlCol="0" anchor="ctr"/>
+          <a:lstStyle/>
+          <a:p>
+            <a:pPr algn="ctr"/>
+          </a:p>
+        </p:txBody>
+      </p:sp>
+      <p:sp>
+        <p:nvSpPr>
+          <p:cNvPr id="4" name="TextBox 3"/>
+          <p:cNvSpPr txBox="1"/>
+          <p:nvPr/>
+        </p:nvSpPr>
+        <p:spPr>
+          <a:xfrm>
+            <a:off x="502920" y="0"/>
+            <a:ext cx="11185855" cy="868680"/>
+          </a:xfrm>
+          <a:prstGeom prst="rect">
+            <a:avLst/>
+          </a:prstGeom>
+          <a:noFill/>
+        </p:spPr>
+        <p:txBody>
+          <a:bodyPr wrap="square" lIns="0" rIns="0" tIns="0" bIns="0" anchor="ctr">
+            <a:noAutofit/>
+          </a:bodyPr>
+          <a:lstStyle/>
+          <a:p>
+            <a:pPr algn="l">
+              <a:lnSpc>
+                <a:spcPct val="110000"/>
+              </a:lnSpc>
+            </a:pPr>
+            <a:r>
+              <a:rPr sz="2800" i="0" b="1">
+                <a:solidFill>
+                  <a:srgbClr val="FFFFFF"/>
+                </a:solidFill>
+                <a:latin typeface="Helvetica Neue"/>
+              </a:rPr>
+              <a:t>Where to go next</a:t>
+            </a:r>
+          </a:p>
+        </p:txBody>
+      </p:sp>
+      <p:sp>
+        <p:nvSpPr>
+          <p:cNvPr id="5" name="Rectangle 4"/>
+          <p:cNvSpPr/>
+          <p:nvPr/>
+        </p:nvSpPr>
+        <p:spPr>
+          <a:xfrm>
+            <a:off x="0" y="868680"/>
+            <a:ext cx="12191695" cy="329184"/>
+          </a:xfrm>
+          <a:prstGeom prst="rect">
+            <a:avLst/>
+          </a:prstGeom>
+          <a:solidFill>
+            <a:srgbClr val="E8EDF5"/>
+          </a:solidFill>
+          <a:ln>
+            <a:noFill/>
+          </a:ln>
+          <a:effectLst/>
+        </p:spPr>
+        <p:style>
+          <a:lnRef idx="1">
+            <a:schemeClr val="accent1"/>
+          </a:lnRef>
+          <a:fillRef idx="3">
+            <a:schemeClr val="accent1"/>
+          </a:fillRef>
+          <a:effectRef idx="2">
+            <a:schemeClr val="accent1"/>
+          </a:effectRef>
+          <a:fontRef idx="minor">
+            <a:schemeClr val="lt1"/>
+          </a:fontRef>
+        </p:style>
+        <p:txBody>
+          <a:bodyPr rtlCol="0" anchor="ctr"/>
+          <a:lstStyle/>
+          <a:p>
+            <a:pPr algn="ctr"/>
+          </a:p>
+        </p:txBody>
+      </p:sp>
+      <p:sp>
+        <p:nvSpPr>
+          <p:cNvPr id="6" name="TextBox 5"/>
+          <p:cNvSpPr txBox="1"/>
+          <p:nvPr/>
+        </p:nvSpPr>
+        <p:spPr>
+          <a:xfrm>
+            <a:off x="502920" y="868680"/>
+            <a:ext cx="7315200" cy="329184"/>
+          </a:xfrm>
+          <a:prstGeom prst="rect">
+            <a:avLst/>
+          </a:prstGeom>
+          <a:noFill/>
+        </p:spPr>
+        <p:txBody>
+          <a:bodyPr wrap="square" lIns="0" rIns="0" tIns="0" bIns="0" anchor="ctr">
+            <a:noAutofit/>
+          </a:bodyPr>
+          <a:lstStyle/>
+          <a:p>
+            <a:pPr algn="l">
+              <a:lnSpc>
+                <a:spcPct val="110000"/>
+              </a:lnSpc>
+            </a:pPr>
+            <a:r>
+              <a:rPr sz="1100" i="0" b="0">
+                <a:solidFill>
+                  <a:srgbClr val="94A3B8"/>
+                </a:solidFill>
+                <a:latin typeface="Helvetica Neue"/>
+              </a:rPr>
+              <a:t>Rules of thumb</a:t>
+            </a:r>
+          </a:p>
+        </p:txBody>
+      </p:sp>
+      <p:sp>
+        <p:nvSpPr>
+          <p:cNvPr id="7" name="TextBox 6"/>
+          <p:cNvSpPr txBox="1"/>
+          <p:nvPr/>
+        </p:nvSpPr>
+        <p:spPr>
+          <a:xfrm>
+            <a:off x="502920" y="6419088"/>
+            <a:ext cx="8229600" cy="274320"/>
+          </a:xfrm>
+          <a:prstGeom prst="rect">
+            <a:avLst/>
+          </a:prstGeom>
+          <a:noFill/>
+        </p:spPr>
+        <p:txBody>
+          <a:bodyPr wrap="square" lIns="0" rIns="0" tIns="0" bIns="0" anchor="t">
+            <a:noAutofit/>
+          </a:bodyPr>
+          <a:lstStyle/>
+          <a:p>
+            <a:pPr algn="l">
+              <a:lnSpc>
+                <a:spcPct val="110000"/>
+              </a:lnSpc>
+            </a:pPr>
+            <a:r>
+              <a:rPr sz="1000" i="1" b="0">
+                <a:solidFill>
+                  <a:srgbClr val="94A3B8"/>
+                </a:solidFill>
+                <a:latin typeface="Helvetica Neue"/>
+              </a:rPr>
+              <a:t>Source: notes/04-partitioning-and-replication.md</a:t>
+            </a:r>
+          </a:p>
+        </p:txBody>
+      </p:sp>
+      <p:sp>
+        <p:nvSpPr>
+          <p:cNvPr id="8" name="TextBox 7"/>
+          <p:cNvSpPr txBox="1"/>
+          <p:nvPr/>
+        </p:nvSpPr>
+        <p:spPr>
+          <a:xfrm>
+            <a:off x="10317175" y="6419088"/>
+            <a:ext cx="1371600" cy="274320"/>
+          </a:xfrm>
+          <a:prstGeom prst="rect">
+            <a:avLst/>
+          </a:prstGeom>
+          <a:noFill/>
+        </p:spPr>
+        <p:txBody>
+          <a:bodyPr wrap="square" lIns="0" rIns="0" tIns="0" bIns="0" anchor="t">
+            <a:noAutofit/>
+          </a:bodyPr>
+          <a:lstStyle/>
+          <a:p>
+            <a:pPr algn="r">
+              <a:lnSpc>
+                <a:spcPct val="110000"/>
+              </a:lnSpc>
+            </a:pPr>
+            <a:r>
+              <a:rPr sz="1000" i="0" b="0">
+                <a:solidFill>
+                  <a:srgbClr val="94A3B8"/>
+                </a:solidFill>
+                <a:latin typeface="Helvetica Neue"/>
+              </a:rPr>
+              <a:t>33</a:t>
+            </a:r>
+          </a:p>
+        </p:txBody>
+      </p:sp>
+      <p:sp>
+        <p:nvSpPr>
+          <p:cNvPr id="9" name="Rectangle 8"/>
+          <p:cNvSpPr/>
+          <p:nvPr/>
+        </p:nvSpPr>
+        <p:spPr>
+          <a:xfrm>
+            <a:off x="502920" y="5715000"/>
+            <a:ext cx="11185855" cy="502920"/>
+          </a:xfrm>
+          <a:prstGeom prst="rect">
+            <a:avLst/>
+          </a:prstGeom>
+          <a:solidFill>
+            <a:srgbClr val="E8F4F8"/>
+          </a:solidFill>
+          <a:ln>
+            <a:noFill/>
+          </a:ln>
+          <a:effectLst/>
+        </p:spPr>
+        <p:style>
+          <a:lnRef idx="1">
+            <a:schemeClr val="accent1"/>
+          </a:lnRef>
+          <a:fillRef idx="3">
+            <a:schemeClr val="accent1"/>
+          </a:fillRef>
+          <a:effectRef idx="2">
+            <a:schemeClr val="accent1"/>
+          </a:effectRef>
+          <a:fontRef idx="minor">
+            <a:schemeClr val="lt1"/>
+          </a:fontRef>
+        </p:style>
+        <p:txBody>
+          <a:bodyPr rtlCol="0" anchor="ctr"/>
+          <a:lstStyle/>
+          <a:p>
+            <a:pPr algn="ctr"/>
+          </a:p>
+        </p:txBody>
+      </p:sp>
+      <p:sp>
+        <p:nvSpPr>
+          <p:cNvPr id="10" name="Rectangle 9"/>
+          <p:cNvSpPr/>
+          <p:nvPr/>
+        </p:nvSpPr>
+        <p:spPr>
+          <a:xfrm>
+            <a:off x="502920" y="5715000"/>
+            <a:ext cx="73152" cy="502920"/>
+          </a:xfrm>
+          <a:prstGeom prst="rect">
+            <a:avLst/>
+          </a:prstGeom>
+          <a:solidFill>
+            <a:srgbClr val="166534"/>
+          </a:solidFill>
+          <a:ln>
+            <a:noFill/>
+          </a:ln>
+          <a:effectLst/>
+        </p:spPr>
+        <p:style>
+          <a:lnRef idx="1">
+            <a:schemeClr val="accent1"/>
+          </a:lnRef>
+          <a:fillRef idx="3">
+            <a:schemeClr val="accent1"/>
+          </a:fillRef>
+          <a:effectRef idx="2">
+            <a:schemeClr val="accent1"/>
+          </a:effectRef>
+          <a:fontRef idx="minor">
+            <a:schemeClr val="lt1"/>
+          </a:fontRef>
+        </p:style>
+        <p:txBody>
+          <a:bodyPr rtlCol="0" anchor="ctr"/>
+          <a:lstStyle/>
+          <a:p>
+            <a:pPr algn="ctr"/>
+          </a:p>
+        </p:txBody>
+      </p:sp>
+      <p:sp>
+        <p:nvSpPr>
+          <p:cNvPr id="11" name="TextBox 10"/>
+          <p:cNvSpPr txBox="1"/>
+          <p:nvPr/>
+        </p:nvSpPr>
+        <p:spPr>
+          <a:xfrm>
+            <a:off x="777240" y="5715000"/>
+            <a:ext cx="10728655" cy="502920"/>
+          </a:xfrm>
+          <a:prstGeom prst="rect">
+            <a:avLst/>
+          </a:prstGeom>
+          <a:noFill/>
+        </p:spPr>
+        <p:txBody>
+          <a:bodyPr wrap="square" lIns="0" rIns="0" tIns="0" bIns="0" anchor="ctr">
+            <a:noAutofit/>
+          </a:bodyPr>
+          <a:lstStyle/>
+          <a:p>
+            <a:pPr algn="l">
+              <a:lnSpc>
+                <a:spcPct val="110000"/>
+              </a:lnSpc>
+            </a:pPr>
+            <a:r>
+              <a:rPr sz="1400" i="0" b="1">
+                <a:solidFill>
+                  <a:srgbClr val="1E3A5F"/>
+                </a:solidFill>
+                <a:latin typeface="Helvetica Neue"/>
+              </a:rPr>
+              <a:t>Later pillars rely on these mechanisms, starting with how to extract from a lagging source and model what arrives.</a:t>
+            </a:r>
+          </a:p>
+        </p:txBody>
+      </p:sp>
+      <p:sp>
+        <p:nvSpPr>
+          <p:cNvPr id="12" name="Rectangle 11"/>
+          <p:cNvSpPr/>
+          <p:nvPr/>
+        </p:nvSpPr>
+        <p:spPr>
+          <a:xfrm>
+            <a:off x="502920" y="1568704"/>
+            <a:ext cx="106680" cy="106680"/>
+          </a:xfrm>
+          <a:prstGeom prst="rect">
+            <a:avLst/>
+          </a:prstGeom>
+          <a:solidFill>
+            <a:srgbClr val="166534"/>
+          </a:solidFill>
+          <a:ln>
+            <a:noFill/>
+          </a:ln>
+          <a:effectLst/>
+        </p:spPr>
+        <p:style>
+          <a:lnRef idx="1">
+            <a:schemeClr val="accent1"/>
+          </a:lnRef>
+          <a:fillRef idx="3">
+            <a:schemeClr val="accent1"/>
+          </a:fillRef>
+          <a:effectRef idx="2">
+            <a:schemeClr val="accent1"/>
+          </a:effectRef>
+          <a:fontRef idx="minor">
+            <a:schemeClr val="lt1"/>
+          </a:fontRef>
+        </p:style>
+        <p:txBody>
+          <a:bodyPr rtlCol="0" anchor="ctr"/>
+          <a:lstStyle/>
+          <a:p>
+            <a:pPr algn="ctr"/>
+          </a:p>
+        </p:txBody>
+      </p:sp>
+      <p:sp>
+        <p:nvSpPr>
+          <p:cNvPr id="13" name="TextBox 12"/>
+          <p:cNvSpPr txBox="1"/>
+          <p:nvPr/>
+        </p:nvSpPr>
+        <p:spPr>
+          <a:xfrm>
+            <a:off x="822960" y="1472184"/>
+            <a:ext cx="5944038" cy="762000"/>
+          </a:xfrm>
+          <a:prstGeom prst="rect">
+            <a:avLst/>
+          </a:prstGeom>
+          <a:noFill/>
+        </p:spPr>
+        <p:txBody>
+          <a:bodyPr wrap="square" lIns="0" rIns="0" tIns="0" bIns="0" anchor="t">
+            <a:noAutofit/>
+          </a:bodyPr>
+          <a:lstStyle/>
+          <a:p>
+            <a:pPr algn="l">
+              <a:lnSpc>
+                <a:spcPct val="110000"/>
+              </a:lnSpc>
+            </a:pPr>
+            <a:r>
+              <a:rPr sz="2000" i="0" b="1">
+                <a:solidFill>
+                  <a:srgbClr val="1E293B"/>
+                </a:solidFill>
+                <a:latin typeface="Helvetica Neue"/>
+              </a:rPr>
+              <a:t>02 Ingest and modelling:</a:t>
+            </a:r>
+            <a:r>
+              <a:rPr sz="2000" i="0" b="0">
+                <a:solidFill>
+                  <a:srgbClr val="1E293B"/>
+                </a:solidFill>
+                <a:latin typeface="Helvetica Neue"/>
+              </a:rPr>
+              <a:t> take data out of sources and shape it for questions.</a:t>
+            </a:r>
+          </a:p>
+        </p:txBody>
+      </p:sp>
+      <p:sp>
+        <p:nvSpPr>
+          <p:cNvPr id="14" name="Rectangle 13"/>
+          <p:cNvSpPr/>
+          <p:nvPr/>
+        </p:nvSpPr>
+        <p:spPr>
+          <a:xfrm>
+            <a:off x="502920" y="2391664"/>
+            <a:ext cx="106680" cy="106680"/>
+          </a:xfrm>
+          <a:prstGeom prst="rect">
+            <a:avLst/>
+          </a:prstGeom>
+          <a:solidFill>
+            <a:srgbClr val="166534"/>
+          </a:solidFill>
+          <a:ln>
+            <a:noFill/>
+          </a:ln>
+          <a:effectLst/>
+        </p:spPr>
+        <p:style>
+          <a:lnRef idx="1">
+            <a:schemeClr val="accent1"/>
+          </a:lnRef>
+          <a:fillRef idx="3">
+            <a:schemeClr val="accent1"/>
+          </a:fillRef>
+          <a:effectRef idx="2">
+            <a:schemeClr val="accent1"/>
+          </a:effectRef>
+          <a:fontRef idx="minor">
+            <a:schemeClr val="lt1"/>
+          </a:fontRef>
+        </p:style>
+        <p:txBody>
+          <a:bodyPr rtlCol="0" anchor="ctr"/>
+          <a:lstStyle/>
+          <a:p>
+            <a:pPr algn="ctr"/>
+          </a:p>
+        </p:txBody>
+      </p:sp>
+      <p:sp>
+        <p:nvSpPr>
+          <p:cNvPr id="15" name="TextBox 14"/>
+          <p:cNvSpPr txBox="1"/>
+          <p:nvPr/>
+        </p:nvSpPr>
+        <p:spPr>
+          <a:xfrm>
+            <a:off x="822960" y="2295144"/>
+            <a:ext cx="5944038" cy="762000"/>
+          </a:xfrm>
+          <a:prstGeom prst="rect">
+            <a:avLst/>
+          </a:prstGeom>
+          <a:noFill/>
+        </p:spPr>
+        <p:txBody>
+          <a:bodyPr wrap="square" lIns="0" rIns="0" tIns="0" bIns="0" anchor="t">
+            <a:noAutofit/>
+          </a:bodyPr>
+          <a:lstStyle/>
+          <a:p>
+            <a:pPr algn="l">
+              <a:lnSpc>
+                <a:spcPct val="110000"/>
+              </a:lnSpc>
+            </a:pPr>
+            <a:r>
+              <a:rPr sz="2000" i="0" b="1">
+                <a:solidFill>
+                  <a:srgbClr val="1E293B"/>
+                </a:solidFill>
+                <a:latin typeface="Helvetica Neue"/>
+              </a:rPr>
+              <a:t>03 Transform and orchestrate:</a:t>
+            </a:r>
+            <a:r>
+              <a:rPr sz="2000" i="0" b="0">
+                <a:solidFill>
+                  <a:srgbClr val="1E293B"/>
+                </a:solidFill>
+                <a:latin typeface="Helvetica Neue"/>
+              </a:rPr>
+              <a:t> idempotent builds use the partitions chosen here.</a:t>
+            </a:r>
+          </a:p>
+        </p:txBody>
+      </p:sp>
+      <p:sp>
+        <p:nvSpPr>
+          <p:cNvPr id="16" name="Rectangle 15"/>
+          <p:cNvSpPr/>
+          <p:nvPr/>
+        </p:nvSpPr>
+        <p:spPr>
+          <a:xfrm>
+            <a:off x="502920" y="3214624"/>
+            <a:ext cx="106680" cy="106680"/>
+          </a:xfrm>
+          <a:prstGeom prst="rect">
+            <a:avLst/>
+          </a:prstGeom>
+          <a:solidFill>
+            <a:srgbClr val="166534"/>
+          </a:solidFill>
+          <a:ln>
+            <a:noFill/>
+          </a:ln>
+          <a:effectLst/>
+        </p:spPr>
+        <p:style>
+          <a:lnRef idx="1">
+            <a:schemeClr val="accent1"/>
+          </a:lnRef>
+          <a:fillRef idx="3">
+            <a:schemeClr val="accent1"/>
+          </a:fillRef>
+          <a:effectRef idx="2">
+            <a:schemeClr val="accent1"/>
+          </a:effectRef>
+          <a:fontRef idx="minor">
+            <a:schemeClr val="lt1"/>
+          </a:fontRef>
+        </p:style>
+        <p:txBody>
+          <a:bodyPr rtlCol="0" anchor="ctr"/>
+          <a:lstStyle/>
+          <a:p>
+            <a:pPr algn="ctr"/>
+          </a:p>
+        </p:txBody>
+      </p:sp>
+      <p:sp>
+        <p:nvSpPr>
+          <p:cNvPr id="17" name="TextBox 16"/>
+          <p:cNvSpPr txBox="1"/>
+          <p:nvPr/>
+        </p:nvSpPr>
+        <p:spPr>
+          <a:xfrm>
+            <a:off x="822960" y="3118104"/>
+            <a:ext cx="5944038" cy="762000"/>
+          </a:xfrm>
+          <a:prstGeom prst="rect">
+            <a:avLst/>
+          </a:prstGeom>
+          <a:noFill/>
+        </p:spPr>
+        <p:txBody>
+          <a:bodyPr wrap="square" lIns="0" rIns="0" tIns="0" bIns="0" anchor="t">
+            <a:noAutofit/>
+          </a:bodyPr>
+          <a:lstStyle/>
+          <a:p>
+            <a:pPr algn="l">
+              <a:lnSpc>
+                <a:spcPct val="110000"/>
+              </a:lnSpc>
+            </a:pPr>
+            <a:r>
+              <a:rPr sz="2000" i="0" b="1">
+                <a:solidFill>
+                  <a:srgbClr val="1E293B"/>
+                </a:solidFill>
+                <a:latin typeface="Helvetica Neue"/>
+              </a:rPr>
+              <a:t>Run the code:</a:t>
+            </a:r>
+            <a:r>
+              <a:rPr sz="2000" i="0" b="0">
+                <a:solidFill>
+                  <a:srgbClr val="1E293B"/>
+                </a:solidFill>
+                <a:latin typeface="Helvetica Neue"/>
+              </a:rPr>
+              <a:t> one script per chapter in </a:t>
+            </a:r>
+            <a:r>
+              <a:rPr sz="1800" i="0" b="0">
+                <a:solidFill>
+                  <a:srgbClr val="0F7490"/>
+                </a:solidFill>
+                <a:latin typeface="Menlo"/>
+              </a:rPr>
+              <a:t>practice/</a:t>
+            </a:r>
+            <a:r>
+              <a:rPr sz="2000" i="0" b="0">
+                <a:solidFill>
+                  <a:srgbClr val="1E293B"/>
+                </a:solidFill>
+                <a:latin typeface="Helvetica Neue"/>
+              </a:rPr>
+              <a:t>.</a:t>
+            </a:r>
+          </a:p>
+        </p:txBody>
+      </p:sp>
+      <p:sp>
+        <p:nvSpPr>
+          <p:cNvPr id="18" name="Rectangle 17"/>
+          <p:cNvSpPr/>
+          <p:nvPr/>
+        </p:nvSpPr>
+        <p:spPr>
+          <a:xfrm>
+            <a:off x="502920" y="4037584"/>
+            <a:ext cx="106680" cy="106680"/>
+          </a:xfrm>
+          <a:prstGeom prst="rect">
+            <a:avLst/>
+          </a:prstGeom>
+          <a:solidFill>
+            <a:srgbClr val="166534"/>
+          </a:solidFill>
+          <a:ln>
+            <a:noFill/>
+          </a:ln>
+          <a:effectLst/>
+        </p:spPr>
+        <p:style>
+          <a:lnRef idx="1">
+            <a:schemeClr val="accent1"/>
+          </a:lnRef>
+          <a:fillRef idx="3">
+            <a:schemeClr val="accent1"/>
+          </a:fillRef>
+          <a:effectRef idx="2">
+            <a:schemeClr val="accent1"/>
+          </a:effectRef>
+          <a:fontRef idx="minor">
+            <a:schemeClr val="lt1"/>
+          </a:fontRef>
+        </p:style>
+        <p:txBody>
+          <a:bodyPr rtlCol="0" anchor="ctr"/>
+          <a:lstStyle/>
+          <a:p>
+            <a:pPr algn="ctr"/>
+          </a:p>
+        </p:txBody>
+      </p:sp>
+      <p:sp>
+        <p:nvSpPr>
+          <p:cNvPr id="19" name="TextBox 18"/>
+          <p:cNvSpPr txBox="1"/>
+          <p:nvPr/>
+        </p:nvSpPr>
+        <p:spPr>
+          <a:xfrm>
+            <a:off x="822960" y="3941064"/>
+            <a:ext cx="5944038" cy="762000"/>
+          </a:xfrm>
+          <a:prstGeom prst="rect">
+            <a:avLst/>
+          </a:prstGeom>
+          <a:noFill/>
+        </p:spPr>
+        <p:txBody>
+          <a:bodyPr wrap="square" lIns="0" rIns="0" tIns="0" bIns="0" anchor="t">
+            <a:noAutofit/>
+          </a:bodyPr>
+          <a:lstStyle/>
+          <a:p>
+            <a:pPr algn="l">
+              <a:lnSpc>
+                <a:spcPct val="110000"/>
+              </a:lnSpc>
+            </a:pPr>
+            <a:r>
+              <a:rPr sz="2000" i="0" b="1">
+                <a:solidFill>
+                  <a:srgbClr val="1E293B"/>
+                </a:solidFill>
+                <a:latin typeface="Helvetica Neue"/>
+              </a:rPr>
+              <a:t>Read:</a:t>
+            </a:r>
+            <a:r>
+              <a:rPr sz="2000" i="0" b="0">
+                <a:solidFill>
+                  <a:srgbClr val="1E293B"/>
+                </a:solidFill>
+                <a:latin typeface="Helvetica Neue"/>
+              </a:rPr>
+              <a:t> Kleppmann, DDIA, ch. 3 to 6 and 10; Abadi 2008; COST 2015.</a:t>
+            </a:r>
+          </a:p>
+        </p:txBody>
+      </p:sp>
+      <p:sp>
+        <p:nvSpPr>
+          <p:cNvPr id="20" name="Rectangle 19"/>
+          <p:cNvSpPr/>
+          <p:nvPr/>
+        </p:nvSpPr>
+        <p:spPr>
+          <a:xfrm>
+            <a:off x="7132758" y="1472184"/>
+            <a:ext cx="4556016" cy="4014215"/>
+          </a:xfrm>
+          <a:prstGeom prst="rect">
+            <a:avLst/>
+          </a:prstGeom>
+          <a:solidFill>
+            <a:srgbClr val="FFFFFF"/>
+          </a:solidFill>
+          <a:ln w="9525">
+            <a:solidFill>
+              <a:srgbClr val="D5DEEA"/>
+            </a:solidFill>
+          </a:ln>
+          <a:effectLst/>
+        </p:spPr>
+        <p:style>
+          <a:lnRef idx="1">
+            <a:schemeClr val="accent1"/>
+          </a:lnRef>
+          <a:fillRef idx="3">
+            <a:schemeClr val="accent1"/>
+          </a:fillRef>
+          <a:effectRef idx="2">
+            <a:schemeClr val="accent1"/>
+          </a:effectRef>
+          <a:fontRef idx="minor">
+            <a:schemeClr val="lt1"/>
+          </a:fontRef>
+        </p:style>
+        <p:txBody>
+          <a:bodyPr rtlCol="0" anchor="ctr"/>
+          <a:lstStyle/>
+          <a:p>
+            <a:pPr algn="ctr"/>
+          </a:p>
+        </p:txBody>
+      </p:sp>
+      <p:sp>
+        <p:nvSpPr>
+          <p:cNvPr id="21" name="Rectangle 20"/>
+          <p:cNvSpPr/>
+          <p:nvPr/>
+        </p:nvSpPr>
+        <p:spPr>
+          <a:xfrm>
+            <a:off x="7132758" y="1472184"/>
+            <a:ext cx="4556016" cy="557784"/>
+          </a:xfrm>
+          <a:prstGeom prst="rect">
+            <a:avLst/>
+          </a:prstGeom>
+          <a:solidFill>
+            <a:srgbClr val="1E3A5F"/>
+          </a:solidFill>
+          <a:ln>
+            <a:noFill/>
+          </a:ln>
+          <a:effectLst/>
+        </p:spPr>
+        <p:style>
+          <a:lnRef idx="1">
+            <a:schemeClr val="accent1"/>
+          </a:lnRef>
+          <a:fillRef idx="3">
+            <a:schemeClr val="accent1"/>
+          </a:fillRef>
+          <a:effectRef idx="2">
+            <a:schemeClr val="accent1"/>
+          </a:effectRef>
+          <a:fontRef idx="minor">
+            <a:schemeClr val="lt1"/>
+          </a:fontRef>
+        </p:style>
+        <p:txBody>
+          <a:bodyPr rtlCol="0" anchor="ctr"/>
+          <a:lstStyle/>
+          <a:p>
+            <a:pPr algn="ctr"/>
+          </a:p>
+        </p:txBody>
+      </p:sp>
+      <p:sp>
+        <p:nvSpPr>
+          <p:cNvPr id="22" name="TextBox 21"/>
+          <p:cNvSpPr txBox="1"/>
+          <p:nvPr/>
+        </p:nvSpPr>
+        <p:spPr>
+          <a:xfrm>
+            <a:off x="7361358" y="1472184"/>
+            <a:ext cx="4098816" cy="557784"/>
+          </a:xfrm>
+          <a:prstGeom prst="rect">
+            <a:avLst/>
+          </a:prstGeom>
+          <a:noFill/>
+        </p:spPr>
+        <p:txBody>
+          <a:bodyPr wrap="square" lIns="0" rIns="0" tIns="0" bIns="0" anchor="ctr">
+            <a:noAutofit/>
+          </a:bodyPr>
+          <a:lstStyle/>
+          <a:p>
+            <a:pPr algn="l">
+              <a:lnSpc>
+                <a:spcPct val="110000"/>
+              </a:lnSpc>
+            </a:pPr>
+            <a:r>
+              <a:rPr sz="1800" i="0" b="1">
+                <a:solidFill>
+                  <a:srgbClr val="FFFFFF"/>
+                </a:solidFill>
+                <a:latin typeface="Helvetica Neue"/>
+              </a:rPr>
+              <a:t>The one idea to keep</a:t>
+            </a:r>
+          </a:p>
+        </p:txBody>
+      </p:sp>
+      <p:sp>
+        <p:nvSpPr>
+          <p:cNvPr id="23" name="TextBox 22"/>
+          <p:cNvSpPr txBox="1"/>
+          <p:nvPr/>
+        </p:nvSpPr>
+        <p:spPr>
+          <a:xfrm>
+            <a:off x="7361358" y="2231136"/>
+            <a:ext cx="4053096" cy="3072383"/>
+          </a:xfrm>
+          <a:prstGeom prst="rect">
+            <a:avLst/>
+          </a:prstGeom>
+          <a:noFill/>
+        </p:spPr>
+        <p:txBody>
+          <a:bodyPr wrap="square" lIns="0" rIns="0" tIns="0" bIns="0" anchor="t">
+            <a:noAutofit/>
+          </a:bodyPr>
+          <a:lstStyle/>
+          <a:p>
+            <a:pPr algn="l">
+              <a:lnSpc>
+                <a:spcPct val="110000"/>
+              </a:lnSpc>
+            </a:pPr>
+            <a:r>
+              <a:rPr sz="1700" i="0" b="0">
+                <a:solidFill>
+                  <a:srgbClr val="475569"/>
+                </a:solidFill>
+                <a:latin typeface="Helvetica Neue"/>
+              </a:rPr>
+              <a:t>Each layer here fails silently, so later stages must not trust it blindly.</a:t>
             </a:r>
           </a:p>
         </p:txBody>
